--- a/docs/competition/AIC视觉分拣技术文档/AIC视觉分拣技术文档.pptx
+++ b/docs/competition/AIC视觉分拣技术文档/AIC视觉分拣技术文档.pptx
@@ -5649,7 +5649,7 @@
                 <a:ea typeface="微软雅黑"/>
                 <a:cs typeface="微软雅黑"/>
               </a:rPr>
-              <a:t>物料从供料管 → 置物台 → 吸盘（跟随龙门）→ 货架层位，全程位置可见</a:t>
+              <a:t>物料从来料架 → 置物台 → 吸盘（跟随龙门）→ 货架层位，全程位置可见</a:t>
             </a:r>
           </a:p>
         </p:txBody>
@@ -12373,7 +12373,7 @@
                           <a:ea typeface="微软雅黑"/>
                           <a:cs typeface="微软雅黑"/>
                         </a:rPr>
-                        <a:t>行程覆盖供料管、置物台、最远层</a:t>
+                        <a:t>行程覆盖来料架、置物台、最远层</a:t>
                       </a:r>
                     </a:p>
                   </a:txBody>
@@ -12920,8 +12920,8 @@
         </p:blipFill>
         <p:spPr>
           <a:xfrm>
-            <a:off x="712400" y="1417320"/>
-            <a:ext cx="6612774" cy="4709160"/>
+            <a:off x="1170138" y="1417320"/>
+            <a:ext cx="5697298" cy="4709159"/>
           </a:xfrm>
           <a:prstGeom prst="rect">
             <a:avLst/>
@@ -13017,7 +13017,7 @@
                 <a:ea typeface="微软雅黑"/>
                 <a:cs typeface="微软雅黑"/>
               </a:rPr>
-              <a:t>置物台 (0.30, −0.15)；12 块物料开机全部叠放在供料管内，按轮次传送</a:t>
+              <a:t>来料架 3×4 开局铺满 12 块；每轮 set_pose 传送到置物台 (0.30, −0.15) 识别</a:t>
             </a:r>
           </a:p>
         </p:txBody>
@@ -17882,7 +17882,7 @@
                 <a:ea typeface="微软雅黑"/>
                 <a:cs typeface="微软雅黑"/>
               </a:rPr>
-              <a:t>识别结果晚到会被下一位点误收（类型错位但结果表仍显示 OK）。窗口按最坏队列时延设定：M3 实测 GOTO→结果 15.5 s，现取 30 s。</a:t>
+              <a:t>识别结果晚到会被下一位点误收（类型错位但结果表仍显示 OK）。窗口按最坏队列时延设定：M4 实测 GOTO→结果 15.5 s，现取 30 s。</a:t>
             </a:r>
           </a:p>
         </p:txBody>

--- a/docs/competition/AIC视觉分拣技术文档/AIC视觉分拣技术文档.pptx
+++ b/docs/competition/AIC视觉分拣技术文档/AIC视觉分拣技术文档.pptx
@@ -14825,7 +14825,7 @@
                 <a:ea typeface="微软雅黑"/>
                 <a:cs typeface="微软雅黑"/>
               </a:rPr>
-              <a:t>缺角面积、孔洞半径都以「盘半径」归一化。Hough 的 dp=1.2 让半径落在 1.2 px 网格上，逐帧抖动 80.3–87.4 px；同一块料的 frac 会从 0.030 漂到 0.072，阈值无从下手。</a:t>
+              <a:t>孔洞半径、划痕长度都按「盘半径」归一化。Hough 的 dp=1.2 让半径落在 1.2 px 网格上，逐帧抖动 80.3–87.4 px；同一块料的 frac 会从 0.030 漂到 0.072，阈值无从下手。</a:t>
             </a:r>
           </a:p>
           <a:p>
@@ -14849,7 +14849,7 @@
                 <a:ea typeface="微软雅黑"/>
                 <a:cs typeface="微软雅黑"/>
               </a:rPr>
-              <a:t>精修后组内标准差 0.10–0.49 px，缺角 frac 收窄到 0.053–0.064，阈值 0.020 才有 2.6 倍余量。</a:t>
+              <a:t>精修后组内标准差 0.10–0.49 px。破损不依赖半径：改用「填充率」fill（0.26 vs 阈值 0.62），随机化后仍稳。</a:t>
             </a:r>
           </a:p>
         </p:txBody>
@@ -15606,7 +15606,7 @@
                           <a:ea typeface="微软雅黑"/>
                           <a:cs typeface="微软雅黑"/>
                         </a:rPr>
-                        <a:t>3 缺角</a:t>
+                        <a:t>3 破损</a:t>
                       </a:r>
                     </a:p>
                   </a:txBody>
@@ -15631,7 +15631,7 @@
                           <a:ea typeface="微软雅黑"/>
                           <a:cs typeface="微软雅黑"/>
                         </a:rPr>
-                        <a:t>径向位置 + 圆度 + 面积</a:t>
+                        <a:t>填充率（折线填不满外接框）+ 长宽比</a:t>
                       </a:r>
                     </a:p>
                   </a:txBody>
@@ -15656,7 +15656,7 @@
                           <a:ea typeface="微软雅黑"/>
                           <a:cs typeface="微软雅黑"/>
                         </a:rPr>
-                        <a:t>rad ≥ 0.68, elong ≤ 5, frac ≥ 0.020</a:t>
+                        <a:t>fill ≤ 0.62, elong ≤ 6, 0.004 ≤ frac ≤ 0.060</a:t>
                       </a:r>
                     </a:p>
                   </a:txBody>
@@ -15681,7 +15681,7 @@
                           <a:ea typeface="微软雅黑"/>
                           <a:cs typeface="微软雅黑"/>
                         </a:rPr>
-                        <a:t>frac 0.053–0.064，2.6 倍</a:t>
+                        <a:t>fill 0.26–0.27，2.3 倍</a:t>
                       </a:r>
                     </a:p>
                   </a:txBody>
@@ -15783,7 +15783,7 @@
                           <a:ea typeface="微软雅黑"/>
                           <a:cs typeface="微软雅黑"/>
                         </a:rPr>
-                        <a:t>与缺角以 elong 5.0 分界</a:t>
+                        <a:t>与破损以 fill 0.62 分界</a:t>
                       </a:r>
                     </a:p>
                   </a:txBody>
@@ -15910,7 +15910,7 @@
                 <a:ea typeface="微软雅黑"/>
                 <a:cs typeface="微软雅黑"/>
               </a:rPr>
-              <a:t>① 阈值不贴实测值：缺角 frac 实测 0.053–0.064，阈值取 0.020 —— 为「精修被拒、退回整像素圆」的最坏情况留口子；真正挡住圆柱侧壁暗沿的是 elong ≤ 5（侧壁实测 7.4–11.3）。</a:t>
+              <a:t>① 阈值不贴实测值：破损 fill 实测 0.26–0.27，阈值取 0.62（2.3 倍）；面积比再留 2.7 倍余量 —— 为「精修被拒、退回整像素圆」的最坏情况留口子。</a:t>
             </a:r>
           </a:p>
           <a:p>
@@ -15934,7 +15934,7 @@
                 <a:ea typeface="微软雅黑"/>
                 <a:cs typeface="微软雅黑"/>
               </a:rPr>
-              <a:t>② 贴边孔洞会伪装成缺角：连通域被侧壁阴影粘住后 circ 0.98→0.34、rad 0.78，几何量整体失效；改用「斑内近黑像素占比」这一物理量，放在缺角判据之前。</a:t>
+              <a:t>② 贴边孔洞会伪装成其它类：连通域被侧壁阴影粘住后 circ 0.98→0.34、rad 0.78，几何量整体失效；改用「斑内近黑像素占比」这一物理量，放在破损判据之前。</a:t>
             </a:r>
           </a:p>
         </p:txBody>
@@ -16461,7 +16461,7 @@
                 <a:ea typeface="微软雅黑"/>
                 <a:cs typeface="微软雅黑"/>
               </a:rPr>
-              <a:t>类型、判据名与关键量（elong / circ / frac / drop / core），由脚本复算而非手写</a:t>
+              <a:t>类型、判据名与关键量（fill / elong / circ / frac / drop / core），由脚本复算而非手写</a:t>
             </a:r>
           </a:p>
         </p:txBody>

--- a/docs/competition/AIC视觉分拣技术文档/AIC视觉分拣技术文档.pptx
+++ b/docs/competition/AIC视觉分拣技术文档/AIC视觉分拣技术文档.pptx
@@ -5649,7 +5649,7 @@
                 <a:ea typeface="微软雅黑"/>
                 <a:cs typeface="微软雅黑"/>
               </a:rPr>
-              <a:t>物料从来料架 → 置物台 → 吸盘（跟随龙门）→ 货架层位，全程位置可见</a:t>
+              <a:t>物料由停料区生成到置物台 → 吸盘（随龙门）→ 货架层位，全程位置可见</a:t>
             </a:r>
           </a:p>
         </p:txBody>
@@ -12348,7 +12348,7 @@
                           <a:ea typeface="微软雅黑"/>
                           <a:cs typeface="微软雅黑"/>
                         </a:rPr>
-                        <a:t>x ±0.45 m、y −0.24…+0.32 m、z −0.20…0 m</a:t>
+                        <a:t>x ±0.45 m、y −0.24…+0.36 m、z −0.20…+0.03 m</a:t>
                       </a:r>
                     </a:p>
                   </a:txBody>
@@ -12373,7 +12373,7 @@
                           <a:ea typeface="微软雅黑"/>
                           <a:cs typeface="微软雅黑"/>
                         </a:rPr>
-                        <a:t>行程覆盖来料架、置物台、最远层</a:t>
+                        <a:t>行程覆盖置物台与四列三层货架</a:t>
                       </a:r>
                     </a:p>
                   </a:txBody>
@@ -12920,8 +12920,8 @@
         </p:blipFill>
         <p:spPr>
           <a:xfrm>
-            <a:off x="1170138" y="1417320"/>
-            <a:ext cx="5697298" cy="4709159"/>
+            <a:off x="658368" y="2184470"/>
+            <a:ext cx="6720840" cy="3174858"/>
           </a:xfrm>
           <a:prstGeom prst="rect">
             <a:avLst/>
@@ -12970,7 +12970,7 @@
                 <a:ea typeface="微软雅黑"/>
                 <a:cs typeface="微软雅黑"/>
               </a:rPr>
-              <a:t>·  上料位</a:t>
+              <a:t>·  生成物料</a:t>
             </a:r>
           </a:p>
         </p:txBody>
@@ -13017,7 +13017,7 @@
                 <a:ea typeface="微软雅黑"/>
                 <a:cs typeface="微软雅黑"/>
               </a:rPr>
-              <a:t>来料架 3×4 开局铺满 12 块；每轮 set_pose 传送到置物台 (0.30, −0.15) 识别</a:t>
+              <a:t>12 块停在底板下停料区；每轮 set_pose 到置物台 (0.30, −0.15)，等效官方「生成物料」</a:t>
             </a:r>
           </a:p>
         </p:txBody>
@@ -13111,7 +13111,7 @@
                 <a:ea typeface="微软雅黑"/>
                 <a:cs typeface="微软雅黑"/>
               </a:rPr>
-              <a:t>4 列 = 四类缺陷；每列 3 层，层位沿 +Y 阶梯错开 0.11 m，避免吸盘升降撞上层托盘</a:t>
+              <a:t>4 列 = 四类缺陷；每列 3 层同一深度（垂直立面），放置走「前出 → 平推 → 落座」</a:t>
             </a:r>
           </a:p>
         </p:txBody>
@@ -17882,7 +17882,7 @@
                 <a:ea typeface="微软雅黑"/>
                 <a:cs typeface="微软雅黑"/>
               </a:rPr>
-              <a:t>识别结果晚到会被下一位点误收（类型错位但结果表仍显示 OK）。窗口按最坏队列时延设定：M4 实测 GOTO→结果 15.5 s，现取 30 s。</a:t>
+              <a:t>识别结果晚到会被下一位点误收（类型错位但结果表仍显示 OK）。窗口按最坏队列时延设定：实测 GOTO→结果 15.5 s，现取 30 s。</a:t>
             </a:r>
           </a:p>
         </p:txBody>

--- a/docs/competition/AIC视觉分拣技术文档/AIC视觉分拣技术文档.pptx
+++ b/docs/competition/AIC视觉分拣技术文档/AIC视觉分拣技术文档.pptx
@@ -14849,7 +14849,7 @@
                 <a:ea typeface="微软雅黑"/>
                 <a:cs typeface="微软雅黑"/>
               </a:rPr>
-              <a:t>精修后组内标准差 0.10–0.49 px。破损不依赖半径：改用「填充率」fill（0.26 vs 阈值 0.62），随机化后仍稳。</a:t>
+              <a:t>精修后组内标准差 0.10–0.49 px。缺角不依赖半径：只用「重心到盘心 / 盘半径」（0.87 vs 0.21），随机化后仍稳。</a:t>
             </a:r>
           </a:p>
         </p:txBody>
@@ -15402,7 +15402,7 @@
                           <a:ea typeface="微软雅黑"/>
                           <a:cs typeface="微软雅黑"/>
                         </a:rPr>
-                        <a:t>4 孔洞</a:t>
+                        <a:t>3 缺角</a:t>
                       </a:r>
                     </a:p>
                   </a:txBody>
@@ -15427,7 +15427,7 @@
                           <a:ea typeface="微软雅黑"/>
                           <a:cs typeface="微软雅黑"/>
                         </a:rPr>
-                        <a:t>圆度 + 面积 + 亮度差；贴边时用「近黑核心」兜底</a:t>
+                        <a:t>贴盘缘（重心半径）+ 非细长（挡掉盘缘暗沿）</a:t>
                       </a:r>
                     </a:p>
                   </a:txBody>
@@ -15452,7 +15452,7 @@
                           <a:ea typeface="微软雅黑"/>
                           <a:cs typeface="微软雅黑"/>
                         </a:rPr>
-                        <a:t>circ ≥ 0.70, 0.008 ≤ frac ≤ 0.045, drop ≥ 100</a:t>
+                        <a:t>rad ≥ 0.70, elong ≤ 4.5</a:t>
                       </a:r>
                     </a:p>
                   </a:txBody>
@@ -15477,7 +15477,211 @@
                           <a:ea typeface="微软雅黑"/>
                           <a:cs typeface="微软雅黑"/>
                         </a:rPr>
-                        <a:t>孔 core 0.23–0.75，其余 0.000</a:t>
+                        <a:t>rad 0.87 vs 0.21（4 倍）</a:t>
+                      </a:r>
+                    </a:p>
+                  </a:txBody>
+                  <a:tcPr marL="73152" marR="54864" marT="27432" marB="27432" anchor="ctr">
+                    <a:solidFill>
+                      <a:srgbClr val="FFFFFF"/>
+                    </a:solidFill>
+                  </a:tcPr>
+                </a:tc>
+              </a:tr>
+              <a:tr h="603504">
+                <a:tc>
+                  <a:txBody>
+                    <a:bodyPr wrap="square"/>
+                    <a:lstStyle/>
+                    <a:p>
+                      <a:pPr algn="l"/>
+                      <a:r>
+                        <a:rPr sz="950" b="0" i="0">
+                          <a:solidFill>
+                            <a:srgbClr val="1A2230"/>
+                          </a:solidFill>
+                          <a:latin typeface="微软雅黑"/>
+                          <a:ea typeface="微软雅黑"/>
+                          <a:cs typeface="微软雅黑"/>
+                        </a:rPr>
+                        <a:t>4 孔洞</a:t>
+                      </a:r>
+                    </a:p>
+                  </a:txBody>
+                  <a:tcPr marL="73152" marR="54864" marT="27432" marB="27432" anchor="ctr">
+                    <a:solidFill>
+                      <a:srgbClr val="F4F7FC"/>
+                    </a:solidFill>
+                  </a:tcPr>
+                </a:tc>
+                <a:tc>
+                  <a:txBody>
+                    <a:bodyPr wrap="square"/>
+                    <a:lstStyle/>
+                    <a:p>
+                      <a:pPr algn="l"/>
+                      <a:r>
+                        <a:rPr sz="950" b="0" i="0">
+                          <a:solidFill>
+                            <a:srgbClr val="1A2230"/>
+                          </a:solidFill>
+                          <a:latin typeface="微软雅黑"/>
+                          <a:ea typeface="微软雅黑"/>
+                          <a:cs typeface="微软雅黑"/>
+                        </a:rPr>
+                        <a:t>空心轮廓「围住」的像素占比 enclosed</a:t>
+                      </a:r>
+                    </a:p>
+                  </a:txBody>
+                  <a:tcPr marL="73152" marR="54864" marT="27432" marB="27432" anchor="ctr">
+                    <a:solidFill>
+                      <a:srgbClr val="F4F7FC"/>
+                    </a:solidFill>
+                  </a:tcPr>
+                </a:tc>
+                <a:tc>
+                  <a:txBody>
+                    <a:bodyPr wrap="square"/>
+                    <a:lstStyle/>
+                    <a:p>
+                      <a:pPr algn="l"/>
+                      <a:r>
+                        <a:rPr sz="950" b="0" i="0">
+                          <a:solidFill>
+                            <a:srgbClr val="1A2230"/>
+                          </a:solidFill>
+                          <a:latin typeface="微软雅黑"/>
+                          <a:ea typeface="微软雅黑"/>
+                          <a:cs typeface="微软雅黑"/>
+                        </a:rPr>
+                        <a:t>enclosed ≥ 0.30, 0.004 ≤ frac ≤ 0.060</a:t>
+                      </a:r>
+                    </a:p>
+                  </a:txBody>
+                  <a:tcPr marL="73152" marR="54864" marT="27432" marB="27432" anchor="ctr">
+                    <a:solidFill>
+                      <a:srgbClr val="F4F7FC"/>
+                    </a:solidFill>
+                  </a:tcPr>
+                </a:tc>
+                <a:tc>
+                  <a:txBody>
+                    <a:bodyPr wrap="square"/>
+                    <a:lstStyle/>
+                    <a:p>
+                      <a:pPr algn="l"/>
+                      <a:r>
+                        <a:rPr sz="950" b="0" i="0">
+                          <a:solidFill>
+                            <a:srgbClr val="1A2230"/>
+                          </a:solidFill>
+                          <a:latin typeface="微软雅黑"/>
+                          <a:ea typeface="微软雅黑"/>
+                          <a:cs typeface="微软雅黑"/>
+                        </a:rPr>
+                        <a:t>1.22 vs 0.00（其余三类恒 0）</a:t>
+                      </a:r>
+                    </a:p>
+                  </a:txBody>
+                  <a:tcPr marL="73152" marR="54864" marT="27432" marB="27432" anchor="ctr">
+                    <a:solidFill>
+                      <a:srgbClr val="F4F7FC"/>
+                    </a:solidFill>
+                  </a:tcPr>
+                </a:tc>
+              </a:tr>
+              <a:tr h="603504">
+                <a:tc>
+                  <a:txBody>
+                    <a:bodyPr wrap="square"/>
+                    <a:lstStyle/>
+                    <a:p>
+                      <a:pPr algn="l"/>
+                      <a:r>
+                        <a:rPr sz="950" b="0" i="0">
+                          <a:solidFill>
+                            <a:srgbClr val="1A2230"/>
+                          </a:solidFill>
+                          <a:latin typeface="微软雅黑"/>
+                          <a:ea typeface="微软雅黑"/>
+                          <a:cs typeface="微软雅黑"/>
+                        </a:rPr>
+                        <a:t>2 污渍</a:t>
+                      </a:r>
+                    </a:p>
+                  </a:txBody>
+                  <a:tcPr marL="73152" marR="54864" marT="27432" marB="27432" anchor="ctr">
+                    <a:solidFill>
+                      <a:srgbClr val="FFFFFF"/>
+                    </a:solidFill>
+                  </a:tcPr>
+                </a:tc>
+                <a:tc>
+                  <a:txBody>
+                    <a:bodyPr wrap="square"/>
+                    <a:lstStyle/>
+                    <a:p>
+                      <a:pPr algn="l"/>
+                      <a:r>
+                        <a:rPr sz="950" b="0" i="0">
+                          <a:solidFill>
+                            <a:srgbClr val="1A2230"/>
+                          </a:solidFill>
+                          <a:latin typeface="微软雅黑"/>
+                          <a:ea typeface="微软雅黑"/>
+                          <a:cs typeface="微软雅黑"/>
+                        </a:rPr>
+                        <a:t>圆度 + 凸包填充（实心圆斑）</a:t>
+                      </a:r>
+                    </a:p>
+                  </a:txBody>
+                  <a:tcPr marL="73152" marR="54864" marT="27432" marB="27432" anchor="ctr">
+                    <a:solidFill>
+                      <a:srgbClr val="FFFFFF"/>
+                    </a:solidFill>
+                  </a:tcPr>
+                </a:tc>
+                <a:tc>
+                  <a:txBody>
+                    <a:bodyPr wrap="square"/>
+                    <a:lstStyle/>
+                    <a:p>
+                      <a:pPr algn="l"/>
+                      <a:r>
+                        <a:rPr sz="950" b="0" i="0">
+                          <a:solidFill>
+                            <a:srgbClr val="1A2230"/>
+                          </a:solidFill>
+                          <a:latin typeface="微软雅黑"/>
+                          <a:ea typeface="微软雅黑"/>
+                          <a:cs typeface="微软雅黑"/>
+                        </a:rPr>
+                        <a:t>circ ≥ 0.60, solidity ≥ 0.85</a:t>
+                      </a:r>
+                    </a:p>
+                  </a:txBody>
+                  <a:tcPr marL="73152" marR="54864" marT="27432" marB="27432" anchor="ctr">
+                    <a:solidFill>
+                      <a:srgbClr val="FFFFFF"/>
+                    </a:solidFill>
+                  </a:tcPr>
+                </a:tc>
+                <a:tc>
+                  <a:txBody>
+                    <a:bodyPr wrap="square"/>
+                    <a:lstStyle/>
+                    <a:p>
+                      <a:pPr algn="l"/>
+                      <a:r>
+                        <a:rPr sz="950" b="0" i="0">
+                          <a:solidFill>
+                            <a:srgbClr val="1A2230"/>
+                          </a:solidFill>
+                          <a:latin typeface="微软雅黑"/>
+                          <a:ea typeface="微软雅黑"/>
+                          <a:cs typeface="微软雅黑"/>
+                        </a:rPr>
+                        <a:t>circ 0.96 vs 0.49（2 倍）</a:t>
                       </a:r>
                     </a:p>
                   </a:txBody>
@@ -15529,211 +15733,7 @@
                           <a:ea typeface="微软雅黑"/>
                           <a:cs typeface="微软雅黑"/>
                         </a:rPr>
-                        <a:t>细长比 + 圆度</a:t>
-                      </a:r>
-                    </a:p>
-                  </a:txBody>
-                  <a:tcPr marL="73152" marR="54864" marT="27432" marB="27432" anchor="ctr">
-                    <a:solidFill>
-                      <a:srgbClr val="F4F7FC"/>
-                    </a:solidFill>
-                  </a:tcPr>
-                </a:tc>
-                <a:tc>
-                  <a:txBody>
-                    <a:bodyPr wrap="square"/>
-                    <a:lstStyle/>
-                    <a:p>
-                      <a:pPr algn="l"/>
-                      <a:r>
-                        <a:rPr sz="950" b="0" i="0">
-                          <a:solidFill>
-                            <a:srgbClr val="1A2230"/>
-                          </a:solidFill>
-                          <a:latin typeface="微软雅黑"/>
-                          <a:ea typeface="微软雅黑"/>
-                          <a:cs typeface="微软雅黑"/>
-                        </a:rPr>
-                        <a:t>elong ≥ 12, circ ≤ 0.25</a:t>
-                      </a:r>
-                    </a:p>
-                  </a:txBody>
-                  <a:tcPr marL="73152" marR="54864" marT="27432" marB="27432" anchor="ctr">
-                    <a:solidFill>
-                      <a:srgbClr val="F4F7FC"/>
-                    </a:solidFill>
-                  </a:tcPr>
-                </a:tc>
-                <a:tc>
-                  <a:txBody>
-                    <a:bodyPr wrap="square"/>
-                    <a:lstStyle/>
-                    <a:p>
-                      <a:pPr algn="l"/>
-                      <a:r>
-                        <a:rPr sz="950" b="0" i="0">
-                          <a:solidFill>
-                            <a:srgbClr val="1A2230"/>
-                          </a:solidFill>
-                          <a:latin typeface="微软雅黑"/>
-                          <a:ea typeface="微软雅黑"/>
-                          <a:cs typeface="微软雅黑"/>
-                        </a:rPr>
-                        <a:t>实测 elong 20.6（划痕）</a:t>
-                      </a:r>
-                    </a:p>
-                  </a:txBody>
-                  <a:tcPr marL="73152" marR="54864" marT="27432" marB="27432" anchor="ctr">
-                    <a:solidFill>
-                      <a:srgbClr val="F4F7FC"/>
-                    </a:solidFill>
-                  </a:tcPr>
-                </a:tc>
-              </a:tr>
-              <a:tr h="603504">
-                <a:tc>
-                  <a:txBody>
-                    <a:bodyPr wrap="square"/>
-                    <a:lstStyle/>
-                    <a:p>
-                      <a:pPr algn="l"/>
-                      <a:r>
-                        <a:rPr sz="950" b="0" i="0">
-                          <a:solidFill>
-                            <a:srgbClr val="1A2230"/>
-                          </a:solidFill>
-                          <a:latin typeface="微软雅黑"/>
-                          <a:ea typeface="微软雅黑"/>
-                          <a:cs typeface="微软雅黑"/>
-                        </a:rPr>
-                        <a:t>3 破损</a:t>
-                      </a:r>
-                    </a:p>
-                  </a:txBody>
-                  <a:tcPr marL="73152" marR="54864" marT="27432" marB="27432" anchor="ctr">
-                    <a:solidFill>
-                      <a:srgbClr val="FFFFFF"/>
-                    </a:solidFill>
-                  </a:tcPr>
-                </a:tc>
-                <a:tc>
-                  <a:txBody>
-                    <a:bodyPr wrap="square"/>
-                    <a:lstStyle/>
-                    <a:p>
-                      <a:pPr algn="l"/>
-                      <a:r>
-                        <a:rPr sz="950" b="0" i="0">
-                          <a:solidFill>
-                            <a:srgbClr val="1A2230"/>
-                          </a:solidFill>
-                          <a:latin typeface="微软雅黑"/>
-                          <a:ea typeface="微软雅黑"/>
-                          <a:cs typeface="微软雅黑"/>
-                        </a:rPr>
-                        <a:t>填充率（折线填不满外接框）+ 长宽比</a:t>
-                      </a:r>
-                    </a:p>
-                  </a:txBody>
-                  <a:tcPr marL="73152" marR="54864" marT="27432" marB="27432" anchor="ctr">
-                    <a:solidFill>
-                      <a:srgbClr val="FFFFFF"/>
-                    </a:solidFill>
-                  </a:tcPr>
-                </a:tc>
-                <a:tc>
-                  <a:txBody>
-                    <a:bodyPr wrap="square"/>
-                    <a:lstStyle/>
-                    <a:p>
-                      <a:pPr algn="l"/>
-                      <a:r>
-                        <a:rPr sz="950" b="0" i="0">
-                          <a:solidFill>
-                            <a:srgbClr val="1A2230"/>
-                          </a:solidFill>
-                          <a:latin typeface="微软雅黑"/>
-                          <a:ea typeface="微软雅黑"/>
-                          <a:cs typeface="微软雅黑"/>
-                        </a:rPr>
-                        <a:t>fill ≤ 0.62, elong ≤ 6, 0.004 ≤ frac ≤ 0.060</a:t>
-                      </a:r>
-                    </a:p>
-                  </a:txBody>
-                  <a:tcPr marL="73152" marR="54864" marT="27432" marB="27432" anchor="ctr">
-                    <a:solidFill>
-                      <a:srgbClr val="FFFFFF"/>
-                    </a:solidFill>
-                  </a:tcPr>
-                </a:tc>
-                <a:tc>
-                  <a:txBody>
-                    <a:bodyPr wrap="square"/>
-                    <a:lstStyle/>
-                    <a:p>
-                      <a:pPr algn="l"/>
-                      <a:r>
-                        <a:rPr sz="950" b="0" i="0">
-                          <a:solidFill>
-                            <a:srgbClr val="1A2230"/>
-                          </a:solidFill>
-                          <a:latin typeface="微软雅黑"/>
-                          <a:ea typeface="微软雅黑"/>
-                          <a:cs typeface="微软雅黑"/>
-                        </a:rPr>
-                        <a:t>fill 0.26–0.27，2.3 倍</a:t>
-                      </a:r>
-                    </a:p>
-                  </a:txBody>
-                  <a:tcPr marL="73152" marR="54864" marT="27432" marB="27432" anchor="ctr">
-                    <a:solidFill>
-                      <a:srgbClr val="FFFFFF"/>
-                    </a:solidFill>
-                  </a:tcPr>
-                </a:tc>
-              </a:tr>
-              <a:tr h="603504">
-                <a:tc>
-                  <a:txBody>
-                    <a:bodyPr wrap="square"/>
-                    <a:lstStyle/>
-                    <a:p>
-                      <a:pPr algn="l"/>
-                      <a:r>
-                        <a:rPr sz="950" b="0" i="0">
-                          <a:solidFill>
-                            <a:srgbClr val="1A2230"/>
-                          </a:solidFill>
-                          <a:latin typeface="微软雅黑"/>
-                          <a:ea typeface="微软雅黑"/>
-                          <a:cs typeface="微软雅黑"/>
-                        </a:rPr>
-                        <a:t>2 污渍</a:t>
-                      </a:r>
-                    </a:p>
-                  </a:txBody>
-                  <a:tcPr marL="73152" marR="54864" marT="27432" marB="27432" anchor="ctr">
-                    <a:solidFill>
-                      <a:srgbClr val="F4F7FC"/>
-                    </a:solidFill>
-                  </a:tcPr>
-                </a:tc>
-                <a:tc>
-                  <a:txBody>
-                    <a:bodyPr wrap="square"/>
-                    <a:lstStyle/>
-                    <a:p>
-                      <a:pPr algn="l"/>
-                      <a:r>
-                        <a:rPr sz="950" b="0" i="0">
-                          <a:solidFill>
-                            <a:srgbClr val="1A2230"/>
-                          </a:solidFill>
-                          <a:latin typeface="微软雅黑"/>
-                          <a:ea typeface="微软雅黑"/>
-                          <a:cs typeface="微软雅黑"/>
-                        </a:rPr>
-                        <a:t>以上都不满足的暗斑（兜底类）</a:t>
+                        <a:t>兜底：细弧钩（细、开口、不闭合）</a:t>
                       </a:r>
                     </a:p>
                   </a:txBody>
@@ -15783,7 +15783,7 @@
                           <a:ea typeface="微软雅黑"/>
                           <a:cs typeface="微软雅黑"/>
                         </a:rPr>
-                        <a:t>与破损以 fill 0.62 分界</a:t>
+                        <a:t>fill 0.19 / solidity 0.24</a:t>
                       </a:r>
                     </a:p>
                   </a:txBody>
@@ -15910,7 +15910,7 @@
                 <a:ea typeface="微软雅黑"/>
                 <a:cs typeface="微软雅黑"/>
               </a:rPr>
-              <a:t>① 阈值不贴实测值：破损 fill 实测 0.26–0.27，阈值取 0.62（2.3 倍）；面积比再留 2.7 倍余量 —— 为「精修被拒、退回整像素圆」的最坏情况留口子。</a:t>
+              <a:t>① 阈值不贴实测值：缺角 rad 实测 0.87，阈值取 0.70；孔洞 enclosed 实测 1.22，阈值取 0.30 —— 为「精修被拒、退回整像素圆」的最坏情况留口子。</a:t>
             </a:r>
           </a:p>
           <a:p>
@@ -15934,7 +15934,7 @@
                 <a:ea typeface="微软雅黑"/>
                 <a:cs typeface="微软雅黑"/>
               </a:rPr>
-              <a:t>② 贴边孔洞会伪装成其它类：连通域被侧壁阴影粘住后 circ 0.98→0.34、rad 0.78，几何量整体失效；改用「斑内近黑像素占比」这一物理量，放在破损判据之前。</a:t>
+              <a:t>② 盘缘暗沿会伪装成缺角：圆柱侧壁的暗沿同样贴边（rad 0.87），但它是细长条（elong 7–11）；判据里用 elong ≤ 4.5 先把它挡掉，再认缺口。</a:t>
             </a:r>
           </a:p>
         </p:txBody>

--- a/docs/competition/AIC视觉分拣技术文档/AIC视觉分拣技术文档.pptx
+++ b/docs/competition/AIC视觉分拣技术文档/AIC视觉分拣技术文档.pptx
@@ -15452,7 +15452,7 @@
                           <a:ea typeface="微软雅黑"/>
                           <a:cs typeface="微软雅黑"/>
                         </a:rPr>
-                        <a:t>rad ≥ 0.70, elong ≤ 4.5</a:t>
+                        <a:t>rad ≥ 0.62, elong ≤ 4.5</a:t>
                       </a:r>
                     </a:p>
                   </a:txBody>
@@ -15477,7 +15477,7 @@
                           <a:ea typeface="微软雅黑"/>
                           <a:cs typeface="微软雅黑"/>
                         </a:rPr>
-                        <a:t>rad 0.87 vs 0.21（4 倍）</a:t>
+                        <a:t>rad 0.78 vs 0.21（3.7 倍）</a:t>
                       </a:r>
                     </a:p>
                   </a:txBody>
@@ -15910,7 +15910,7 @@
                 <a:ea typeface="微软雅黑"/>
                 <a:cs typeface="微软雅黑"/>
               </a:rPr>
-              <a:t>① 阈值不贴实测值：缺角 rad 实测 0.87，阈值取 0.70；孔洞 enclosed 实测 1.22，阈值取 0.30 —— 为「精修被拒、退回整像素圆」的最坏情况留口子。</a:t>
+              <a:t>① 阈值不贴实测值：缺角 rad 实测 0.78，阈值取 0.62；孔洞 enclosed 实测 1.22，阈值取 0.30 —— 为「精修被拒、退回整像素圆」的最坏情况留口子。</a:t>
             </a:r>
           </a:p>
           <a:p>
